--- a/10-Knowledge-Products/KP1-GEA/videos/module_1/fr/decks/KP1_M1_1.1_Deck_v0.1.pptx
+++ b/10-Knowledge-Products/KP1-GEA/videos/module_1/fr/decks/KP1_M1_1.1_Deck_v0.1.pptx
@@ -11691,7 +11691,7 @@
                 </a:solidFill>
                 <a:latin typeface="Arial"/>
               </a:rPr>
-              <a:t>KP1 · Architecture d’entreprise gouvernementale · Module 1 · Vidéo 1.1</a:t>
+              <a:t>Architecture d’entreprise gouvernementale · Module 1 · Vidéo 1.1</a:t>
             </a:r>
           </a:p>
           <a:p>
@@ -12419,7 +12419,7 @@
                 </a:solidFill>
                 <a:latin typeface="Arial"/>
               </a:rPr>
-              <a:t>KP1 · MODULE 1 · VIDÉO 1.1</a:t>
+              <a:t>MODULE 1 · VIDÉO 1.1</a:t>
             </a:r>
           </a:p>
         </p:txBody>
